--- a/carpentry/intake-142/PowerPoint/Day-17_2026-11-27_Week-5.pptx
+++ b/carpentry/intake-142/PowerPoint/Day-17_2026-11-27_Week-5.pptx
@@ -1193,7 +1193,7 @@
           <a:p/>
           <a:p>
             <a:r>
-              <a:t>On page 140, the textbook turns the boundary walk into several formulas. A rectangle has two pairs of matching edges, so P equals 2 times l plus w in brackets. A square has four equal edges, giving 4s. A triangle needs the sum of its three sides. Which formula would you use for a triangle with unequal sides? Add all three labelled sides. A formula is a short way to record a boundary sum. If you cannot connect each term to an edge in the drawing, return to tracing the outside first.</a:t>
+              <a:t>On pages 220–221, the textbook turns the boundary walk into several formulas. A rectangle has two pairs of matching edges, so P equals 2 times l plus w in brackets. A square has four equal edges, giving 4s. A triangle needs the sum of its three sides. Which formula would you use for a triangle with unequal sides? Add all three labelled sides. A formula is a short way to record a boundary sum. If you cannot connect each term to an edge in the drawing, return to tracing the outside first.</a:t>
             </a:r>
           </a:p>
         </p:txBody>
@@ -2743,7 +2743,7 @@
           <a:p/>
           <a:p>
             <a:r>
-              <a:t>Figure 9.1 on page 142 separates the three measurements visually. The radius goes from centre to edge; the diameter crosses through the centre; the circumference goes around. Imagine wrapping a string around the circle and laying it beside the diameter. It is a little more than three diameters long: that ratio is pi. Which is longer, circumference or diameter? Circumference, about 3.14 times as long. That estimate is useful before calculation. If your circumference is smaller than the diameter, stop and check the formula or the values you entered.</a:t>
+              <a:t>Figure 9.1 on page 222 separates the three measurements visually. The radius goes from centre to edge; the diameter crosses through the centre; the circumference goes around. Imagine wrapping a string around the circle and laying it beside the diameter. It is a little more than three diameters long: that ratio is pi. Which is longer, circumference or diameter? Circumference, about 3.14 times as long. That estimate is useful before calculation. If your circumference is smaller than the diameter, stop and check the formula or the values you entered.</a:t>
             </a:r>
           </a:p>
         </p:txBody>
@@ -2819,7 +2819,7 @@
           <a:p/>
           <a:p>
             <a:r>
-              <a:t>Example 9.9 on page 146 is a curved handrail following a 120-degree arc of a circle 2,400 millimetres in diameter. First find the fraction: 120 divided by 360 is one third. The rail length is one third times π times 2,400, giving 2,513.27 millimetres to two decimals. Why do we not add the diameter here? The requested rail follows the curved arc only; it does not close the shape with a straight bar. The physical path in the question determines which lengths belong in the calculation.</a:t>
+              <a:t>Example 9.9 on page 227 is a curved handrail following a 120-degree arc of a circle 2,400 millimetres in diameter. First find the fraction: 120 divided by 360 is one third. The rail length is one third times π times 2,400, giving 2,513.27 millimetres to two decimals. Why do we not add the diameter here? The requested rail follows the curved arc only; it does not close the shape with a straight bar. The physical path in the question determines which lengths belong in the calculation.</a:t>
             </a:r>
           </a:p>
         </p:txBody>
@@ -5445,7 +5445,7 @@
                 </a:solidFill>
                 <a:latin typeface="Arial"/>
               </a:rPr>
-              <a:t>Textbook sections 9.1 p.140; sections 9.6 pp.147–148</a:t>
+              <a:t>Textbook sections 9.1 pp.220–221; sections 9.6 pp.228–229</a:t>
             </a:r>
           </a:p>
         </p:txBody>
@@ -6203,7 +6203,7 @@
                 </a:solidFill>
                 <a:latin typeface="Arial"/>
               </a:rPr>
-              <a:t>Textbook sections 9.1 p.140; sections 9.6 pp.147–148</a:t>
+              <a:t>Textbook sections 9.1 pp.220–221; sections 9.6 pp.228–229</a:t>
             </a:r>
           </a:p>
         </p:txBody>
@@ -6403,7 +6403,7 @@
                 </a:solidFill>
                 <a:latin typeface="Arial"/>
               </a:rPr>
-              <a:t>Resources: Exercise Book 9A Q1–8 (p.57); 9B Q1 (p.59); 9C Q1–2 (p.61)</a:t>
+              <a:t>Resources: Exercise Book 9A Q1–8 (p.85); 9B Q1 (p.87); 9C Q1–2 (p.89)</a:t>
             </a:r>
           </a:p>
         </p:txBody>
@@ -7017,7 +7017,7 @@
                 </a:solidFill>
                 <a:latin typeface="Arial"/>
               </a:rPr>
-              <a:t>Textbook sections 9.1 p.140; sections 9.6 pp.147–148</a:t>
+              <a:t>Textbook sections 9.1 pp.220–221; sections 9.6 pp.228–229</a:t>
             </a:r>
           </a:p>
         </p:txBody>
@@ -7773,7 +7773,7 @@
                 </a:solidFill>
                 <a:latin typeface="Arial"/>
               </a:rPr>
-              <a:t>Textbook sections 9.1 p.140; sections 9.6 pp.147–148</a:t>
+              <a:t>Textbook sections 9.1 pp.220–221; sections 9.6 pp.228–229</a:t>
             </a:r>
           </a:p>
         </p:txBody>
@@ -8507,7 +8507,7 @@
                 </a:solidFill>
                 <a:latin typeface="Arial"/>
               </a:rPr>
-              <a:t>Textbook sections 9.1 p.140; sections 9.6 pp.147–148</a:t>
+              <a:t>Textbook sections 9.1 pp.220–221; sections 9.6 pp.228–229</a:t>
             </a:r>
           </a:p>
         </p:txBody>
@@ -8707,7 +8707,7 @@
                 </a:solidFill>
                 <a:latin typeface="Arial"/>
               </a:rPr>
-              <a:t>Resources: Exercise Book 9A Q1–8 (p.57); 9B Q1 (p.59); 9C Q1–2 (p.61)</a:t>
+              <a:t>Resources: Exercise Book 9A Q1–8 (p.85); 9B Q1 (p.87); 9C Q1–2 (p.89)</a:t>
             </a:r>
           </a:p>
         </p:txBody>
@@ -9321,7 +9321,7 @@
                 </a:solidFill>
                 <a:latin typeface="Arial"/>
               </a:rPr>
-              <a:t>Textbook sections 9.1 p.140; sections 9.6 pp.147–148</a:t>
+              <a:t>Textbook sections 9.1 pp.220–221; sections 9.6 pp.228–229</a:t>
             </a:r>
           </a:p>
         </p:txBody>
@@ -10097,7 +10097,7 @@
                 </a:solidFill>
                 <a:latin typeface="Arial"/>
               </a:rPr>
-              <a:t>Textbook sections 9.1 p.140; sections 9.6 pp.147–148</a:t>
+              <a:t>Textbook sections 9.1 pp.220–221; sections 9.6 pp.228–229</a:t>
             </a:r>
           </a:p>
         </p:txBody>
@@ -11056,7 +11056,7 @@
                 </a:solidFill>
                 <a:latin typeface="Arial"/>
               </a:rPr>
-              <a:t>Textbook sections 9.1 p.140; sections 9.6 pp.147–148</a:t>
+              <a:t>Textbook sections 9.1 pp.220–221; sections 9.6 pp.228–229</a:t>
             </a:r>
           </a:p>
         </p:txBody>
@@ -11767,7 +11767,7 @@
                 </a:solidFill>
                 <a:latin typeface="Arial"/>
               </a:rPr>
-              <a:t>Textbook sections 9.1 p.140; sections 9.6 pp.147–148</a:t>
+              <a:t>Textbook sections 9.1 pp.220–221; sections 9.6 pp.228–229</a:t>
             </a:r>
           </a:p>
         </p:txBody>
@@ -12454,7 +12454,7 @@
                 </a:solidFill>
                 <a:latin typeface="Arial"/>
               </a:rPr>
-              <a:t>Textbook sections 9.1 p.140; sections 9.6 pp.147–148</a:t>
+              <a:t>Textbook sections 9.1 pp.220–221; sections 9.6 pp.228–229</a:t>
             </a:r>
           </a:p>
         </p:txBody>
@@ -12654,7 +12654,7 @@
                 </a:solidFill>
                 <a:latin typeface="Arial"/>
               </a:rPr>
-              <a:t>Resources: Exercise Book 9A Q1–8 (p.57); 9B Q1 (p.59); 9C Q1–2 (p.61)</a:t>
+              <a:t>Resources: Exercise Book 9A Q1–8 (p.85); 9B Q1 (p.87); 9C Q1–2 (p.89)</a:t>
             </a:r>
           </a:p>
         </p:txBody>
@@ -16620,7 +16620,7 @@
                 </a:solidFill>
                 <a:latin typeface="Arial"/>
               </a:rPr>
-              <a:t>Textbook sections 9.1 p.140; sections 9.6 pp.147–148</a:t>
+              <a:t>Textbook sections 9.1 pp.220–221; sections 9.6 pp.228–229</a:t>
             </a:r>
           </a:p>
         </p:txBody>
@@ -17331,7 +17331,7 @@
                 </a:solidFill>
                 <a:latin typeface="Arial"/>
               </a:rPr>
-              <a:t>Textbook sections 9.1 p.140; sections 9.6 pp.147–148</a:t>
+              <a:t>Textbook sections 9.1 pp.220–221; sections 9.6 pp.228–229</a:t>
             </a:r>
           </a:p>
         </p:txBody>
@@ -18042,7 +18042,7 @@
                 </a:solidFill>
                 <a:latin typeface="Arial"/>
               </a:rPr>
-              <a:t>Textbook sections 9.1 p.140; sections 9.6 pp.147–148</a:t>
+              <a:t>Textbook sections 9.1 pp.220–221; sections 9.6 pp.228–229</a:t>
             </a:r>
           </a:p>
         </p:txBody>
@@ -18242,7 +18242,7 @@
                 </a:solidFill>
                 <a:latin typeface="Arial"/>
               </a:rPr>
-              <a:t>Resources: Exercise Book 9A Q1–8 (p.57); 9B Q1 (p.59); 9C Q1–2 (p.61)</a:t>
+              <a:t>Resources: Exercise Book 9A Q1–8 (p.85); 9B Q1 (p.87); 9C Q1–2 (p.89)</a:t>
             </a:r>
           </a:p>
         </p:txBody>
@@ -19521,7 +19521,7 @@
                 </a:solidFill>
                 <a:latin typeface="Arial"/>
               </a:rPr>
-              <a:t>Textbook sections 9.2–9.6 pp.141–148</a:t>
+              <a:t>Textbook sections 9.2–9.6 pp.222–229</a:t>
             </a:r>
           </a:p>
         </p:txBody>
@@ -19721,7 +19721,7 @@
                 </a:solidFill>
                 <a:latin typeface="Arial"/>
               </a:rPr>
-              <a:t>Textbook sections 9.2–9.6 pp.141–148</a:t>
+              <a:t>Textbook sections 9.2–9.6 pp.222–229</a:t>
             </a:r>
           </a:p>
         </p:txBody>
@@ -19769,7 +19769,7 @@
                 </a:solidFill>
                 <a:latin typeface="Arial"/>
               </a:rPr>
-              <a:t>Exercise Book 9A Q9–17 (p.58), selected; 9B Q2,8 (p.59); 9C Q3–5 (pp.61–62)</a:t>
+              <a:t>Exercise Book 9A Q9–17 (p.86), selected; 9B Q2,8 (p.87); 9C Q3–5 (pp.89–90)</a:t>
             </a:r>
           </a:p>
         </p:txBody>
@@ -20431,7 +20431,7 @@
                 </a:solidFill>
                 <a:latin typeface="Arial"/>
               </a:rPr>
-              <a:t>Textbook sections 9.2–9.6 pp.141–148</a:t>
+              <a:t>Textbook sections 9.2–9.6 pp.222–229</a:t>
             </a:r>
           </a:p>
         </p:txBody>
@@ -20631,7 +20631,7 @@
                 </a:solidFill>
                 <a:latin typeface="Arial"/>
               </a:rPr>
-              <a:t>Resources: Exercise Book 9A Q9–17 (p.58), selected; 9B Q2,8 (p.59); 9C Q3–5 (pp.61–62)</a:t>
+              <a:t>Resources: Exercise Book 9A Q9–17 (p.86), selected; 9B Q2,8 (p.87); 9C Q3–5 (pp.89–90)</a:t>
             </a:r>
           </a:p>
         </p:txBody>
@@ -21380,7 +21380,7 @@
                 </a:solidFill>
                 <a:latin typeface="Arial"/>
               </a:rPr>
-              <a:t>Textbook sections 9.2–9.6 pp.141–148</a:t>
+              <a:t>Textbook sections 9.2–9.6 pp.222–229</a:t>
             </a:r>
           </a:p>
         </p:txBody>
@@ -22625,7 +22625,7 @@
                 </a:solidFill>
                 <a:latin typeface="Arial"/>
               </a:rPr>
-              <a:t>Textbook sections 9.2–9.6 pp.141–148</a:t>
+              <a:t>Textbook sections 9.2–9.6 pp.222–229</a:t>
             </a:r>
           </a:p>
         </p:txBody>
@@ -24587,7 +24587,7 @@
                 </a:solidFill>
                 <a:latin typeface="Arial"/>
               </a:rPr>
-              <a:t>Textbook  |  page 142</a:t>
+              <a:t>Textbook  |  page 222</a:t>
             </a:r>
           </a:p>
         </p:txBody>
@@ -24635,7 +24635,7 @@
                 </a:solidFill>
                 <a:latin typeface="Arial"/>
               </a:rPr>
-              <a:t>Textbook sections 9.2–9.6 pp.141–148</a:t>
+              <a:t>Textbook sections 9.2–9.6 pp.222–229</a:t>
             </a:r>
           </a:p>
         </p:txBody>
@@ -24707,7 +24707,7 @@
                 </a:solidFill>
                 <a:latin typeface="Arial"/>
               </a:rPr>
-              <a:t>Textbook p.142 • Figure 9.1 — Radius, diameter and circumference</a:t>
+              <a:t>Textbook p.222 • Figure 9.1 — Radius, diameter and circumference</a:t>
             </a:r>
           </a:p>
         </p:txBody>
@@ -25276,7 +25276,7 @@
                 </a:solidFill>
                 <a:latin typeface="Arial"/>
               </a:rPr>
-              <a:t>Textbook sections 9.1 p.140; sections 9.6 pp.147–148</a:t>
+              <a:t>Textbook sections 9.1 pp.220–221; sections 9.6 pp.228–229</a:t>
             </a:r>
           </a:p>
         </p:txBody>
@@ -25476,7 +25476,7 @@
                 </a:solidFill>
                 <a:latin typeface="Arial"/>
               </a:rPr>
-              <a:t>Textbook sections 9.1 p.140; sections 9.6 pp.147–148</a:t>
+              <a:t>Textbook sections 9.1 pp.220–221; sections 9.6 pp.228–229</a:t>
             </a:r>
           </a:p>
         </p:txBody>
@@ -25524,7 +25524,7 @@
                 </a:solidFill>
                 <a:latin typeface="Arial"/>
               </a:rPr>
-              <a:t>Exercise Book 9A Q1–8 (p.57); 9B Q1 (p.59); 9C Q1–2 (p.61)</a:t>
+              <a:t>Exercise Book 9A Q1–8 (p.85); 9B Q1 (p.87); 9C Q1–2 (p.89)</a:t>
             </a:r>
           </a:p>
         </p:txBody>
@@ -26138,7 +26138,7 @@
                 </a:solidFill>
                 <a:latin typeface="Arial"/>
               </a:rPr>
-              <a:t>Textbook  |  page 146</a:t>
+              <a:t>Textbook  |  page 227</a:t>
             </a:r>
           </a:p>
         </p:txBody>
@@ -26186,7 +26186,7 @@
                 </a:solidFill>
                 <a:latin typeface="Arial"/>
               </a:rPr>
-              <a:t>Textbook sections 9.2–9.6 pp.141–148</a:t>
+              <a:t>Textbook sections 9.2–9.6 pp.222–229</a:t>
             </a:r>
           </a:p>
         </p:txBody>
@@ -26258,7 +26258,7 @@
                 </a:solidFill>
                 <a:latin typeface="Arial"/>
               </a:rPr>
-              <a:t>Textbook p.146 • Example 9.9 — A curved handrail as a fraction of a circumference</a:t>
+              <a:t>Textbook p.227 • Example 9.9 — A curved handrail as a fraction of a circumference</a:t>
             </a:r>
           </a:p>
         </p:txBody>
@@ -26872,7 +26872,7 @@
                 </a:solidFill>
                 <a:latin typeface="Arial"/>
               </a:rPr>
-              <a:t>Textbook sections 9.2–9.6 pp.141–148</a:t>
+              <a:t>Textbook sections 9.2–9.6 pp.222–229</a:t>
             </a:r>
           </a:p>
         </p:txBody>
@@ -27630,7 +27630,7 @@
                 </a:solidFill>
                 <a:latin typeface="Arial"/>
               </a:rPr>
-              <a:t>Textbook sections 9.2–9.6 pp.141–148</a:t>
+              <a:t>Textbook sections 9.2–9.6 pp.222–229</a:t>
             </a:r>
           </a:p>
         </p:txBody>
@@ -27830,7 +27830,7 @@
                 </a:solidFill>
                 <a:latin typeface="Arial"/>
               </a:rPr>
-              <a:t>Resources: Exercise Book 9A Q9–17 (p.58), selected; 9B Q2,8 (p.59); 9C Q3–5 (pp.61–62)</a:t>
+              <a:t>Resources: Exercise Book 9A Q9–17 (p.86), selected; 9B Q2,8 (p.87); 9C Q3–5 (pp.89–90)</a:t>
             </a:r>
           </a:p>
         </p:txBody>
@@ -28444,7 +28444,7 @@
                 </a:solidFill>
                 <a:latin typeface="Arial"/>
               </a:rPr>
-              <a:t>Textbook sections 9.2–9.6 pp.141–148</a:t>
+              <a:t>Textbook sections 9.2–9.6 pp.222–229</a:t>
             </a:r>
           </a:p>
         </p:txBody>
@@ -29200,7 +29200,7 @@
                 </a:solidFill>
                 <a:latin typeface="Arial"/>
               </a:rPr>
-              <a:t>Textbook sections 9.2–9.6 pp.141–148</a:t>
+              <a:t>Textbook sections 9.2–9.6 pp.222–229</a:t>
             </a:r>
           </a:p>
         </p:txBody>
@@ -29934,7 +29934,7 @@
                 </a:solidFill>
                 <a:latin typeface="Arial"/>
               </a:rPr>
-              <a:t>Textbook sections 9.2–9.6 pp.141–148</a:t>
+              <a:t>Textbook sections 9.2–9.6 pp.222–229</a:t>
             </a:r>
           </a:p>
         </p:txBody>
@@ -30134,7 +30134,7 @@
                 </a:solidFill>
                 <a:latin typeface="Arial"/>
               </a:rPr>
-              <a:t>Resources: Exercise Book 9A Q9–17 (p.58), selected; 9B Q2,8 (p.59); 9C Q3–5 (pp.61–62)</a:t>
+              <a:t>Resources: Exercise Book 9A Q9–17 (p.86), selected; 9B Q2,8 (p.87); 9C Q3–5 (pp.89–90)</a:t>
             </a:r>
           </a:p>
         </p:txBody>
@@ -30748,7 +30748,7 @@
                 </a:solidFill>
                 <a:latin typeface="Arial"/>
               </a:rPr>
-              <a:t>Textbook sections 9.2–9.6 pp.141–148</a:t>
+              <a:t>Textbook sections 9.2–9.6 pp.222–229</a:t>
             </a:r>
           </a:p>
         </p:txBody>
@@ -31524,7 +31524,7 @@
                 </a:solidFill>
                 <a:latin typeface="Arial"/>
               </a:rPr>
-              <a:t>Textbook sections 9.2–9.6 pp.141–148</a:t>
+              <a:t>Textbook sections 9.2–9.6 pp.222–229</a:t>
             </a:r>
           </a:p>
         </p:txBody>
@@ -32483,7 +32483,7 @@
                 </a:solidFill>
                 <a:latin typeface="Arial"/>
               </a:rPr>
-              <a:t>Textbook sections 9.2–9.6 pp.141–148</a:t>
+              <a:t>Textbook sections 9.2–9.6 pp.222–229</a:t>
             </a:r>
           </a:p>
         </p:txBody>
@@ -33194,7 +33194,7 @@
                 </a:solidFill>
                 <a:latin typeface="Arial"/>
               </a:rPr>
-              <a:t>Textbook sections 9.2–9.6 pp.141–148</a:t>
+              <a:t>Textbook sections 9.2–9.6 pp.222–229</a:t>
             </a:r>
           </a:p>
         </p:txBody>
@@ -33881,7 +33881,7 @@
                 </a:solidFill>
                 <a:latin typeface="Arial"/>
               </a:rPr>
-              <a:t>Textbook sections 9.1 p.140; sections 9.6 pp.147–148</a:t>
+              <a:t>Textbook sections 9.1 pp.220–221; sections 9.6 pp.228–229</a:t>
             </a:r>
           </a:p>
         </p:txBody>
@@ -34081,7 +34081,7 @@
                 </a:solidFill>
                 <a:latin typeface="Arial"/>
               </a:rPr>
-              <a:t>Resources: Exercise Book 9A Q1–8 (p.57); 9B Q1 (p.59); 9C Q1–2 (p.61)</a:t>
+              <a:t>Resources: Exercise Book 9A Q1–8 (p.85); 9B Q1 (p.87); 9C Q1–2 (p.89)</a:t>
             </a:r>
           </a:p>
         </p:txBody>
@@ -34695,7 +34695,7 @@
                 </a:solidFill>
                 <a:latin typeface="Arial"/>
               </a:rPr>
-              <a:t>Textbook sections 9.2–9.6 pp.141–148</a:t>
+              <a:t>Textbook sections 9.2–9.6 pp.222–229</a:t>
             </a:r>
           </a:p>
         </p:txBody>
@@ -34895,7 +34895,7 @@
                 </a:solidFill>
                 <a:latin typeface="Arial"/>
               </a:rPr>
-              <a:t>Resources: Exercise Book 9A Q9–17 (p.58), selected; 9B Q2,8 (p.59); 9C Q3–5 (pp.61–62)</a:t>
+              <a:t>Resources: Exercise Book 9A Q9–17 (p.86), selected; 9B Q2,8 (p.87); 9C Q3–5 (pp.89–90)</a:t>
             </a:r>
           </a:p>
         </p:txBody>
@@ -35509,7 +35509,7 @@
                 </a:solidFill>
                 <a:latin typeface="Arial"/>
               </a:rPr>
-              <a:t>Textbook sections 9.2–9.6 pp.141–148</a:t>
+              <a:t>Textbook sections 9.2–9.6 pp.222–229</a:t>
             </a:r>
           </a:p>
         </p:txBody>
@@ -36220,7 +36220,7 @@
                 </a:solidFill>
                 <a:latin typeface="Arial"/>
               </a:rPr>
-              <a:t>Textbook sections 9.2–9.6 pp.141–148</a:t>
+              <a:t>Textbook sections 9.2–9.6 pp.222–229</a:t>
             </a:r>
           </a:p>
         </p:txBody>
@@ -36931,7 +36931,7 @@
                 </a:solidFill>
                 <a:latin typeface="Arial"/>
               </a:rPr>
-              <a:t>Textbook sections 9.2–9.6 pp.141–148</a:t>
+              <a:t>Textbook sections 9.2–9.6 pp.222–229</a:t>
             </a:r>
           </a:p>
         </p:txBody>
@@ -37131,7 +37131,7 @@
                 </a:solidFill>
                 <a:latin typeface="Arial"/>
               </a:rPr>
-              <a:t>Resources: Exercise Book 9A Q9–17 (p.58), selected; 9B Q2,8 (p.59); 9C Q3–5 (pp.61–62)</a:t>
+              <a:t>Resources: Exercise Book 9A Q9–17 (p.86), selected; 9B Q2,8 (p.87); 9C Q3–5 (pp.89–90)</a:t>
             </a:r>
           </a:p>
         </p:txBody>
@@ -37880,7 +37880,7 @@
                 </a:solidFill>
                 <a:latin typeface="Arial"/>
               </a:rPr>
-              <a:t>Textbook sections 9.1 p.140; sections 9.6 pp.147–148</a:t>
+              <a:t>Textbook sections 9.1 pp.220–221; sections 9.6 pp.228–229</a:t>
             </a:r>
           </a:p>
         </p:txBody>
@@ -39125,7 +39125,7 @@
                 </a:solidFill>
                 <a:latin typeface="Arial"/>
               </a:rPr>
-              <a:t>Textbook sections 9.1 p.140; sections 9.6 pp.147–148</a:t>
+              <a:t>Textbook sections 9.1 pp.220–221; sections 9.6 pp.228–229</a:t>
             </a:r>
           </a:p>
         </p:txBody>
@@ -40581,7 +40581,7 @@
                 <a:ea typeface="Arial" pitchFamily="34" charset="-122"/>
                 <a:cs typeface="Arial" pitchFamily="34" charset="-120"/>
               </a:rPr>
-              <a:t>Textbook p.140 • Exercise Book 9B Q1 p.59 • Diagram is schematic; read labels, not screen size</a:t>
+              <a:t>Textbook pp.220–221 • Exercise Book 9B Q1 p.87 • Diagram is schematic; read labels, not screen size</a:t>
             </a:r>
             <a:endParaRPr lang="en-US" sz="1050" dirty="0"/>
           </a:p>
@@ -41153,7 +41153,7 @@
                 </a:solidFill>
                 <a:latin typeface="Arial"/>
               </a:rPr>
-              <a:t>Textbook  |  page 140</a:t>
+              <a:t>Textbook  |  pages 220–221</a:t>
             </a:r>
           </a:p>
         </p:txBody>
@@ -41201,7 +41201,7 @@
                 </a:solidFill>
                 <a:latin typeface="Arial"/>
               </a:rPr>
-              <a:t>Textbook sections 9.1 p.140; sections 9.6 pp.147–148</a:t>
+              <a:t>Textbook sections 9.1 pp.220–221; sections 9.6 pp.228–229</a:t>
             </a:r>
           </a:p>
         </p:txBody>
@@ -41273,7 +41273,7 @@
                 </a:solidFill>
                 <a:latin typeface="Arial"/>
               </a:rPr>
-              <a:t>Textbook p.140 • Perimeter — Outside boundary and formulas</a:t>
+              <a:t>Textbook pp.220–221 • Perimeter — Outside boundary and formulas</a:t>
             </a:r>
           </a:p>
         </p:txBody>
@@ -41839,7 +41839,7 @@
                 </a:solidFill>
                 <a:latin typeface="Arial"/>
               </a:rPr>
-              <a:t>Textbook  |  page 140</a:t>
+              <a:t>Textbook  |  page 220</a:t>
             </a:r>
           </a:p>
         </p:txBody>
@@ -41887,7 +41887,7 @@
                 </a:solidFill>
                 <a:latin typeface="Arial"/>
               </a:rPr>
-              <a:t>Textbook sections 9.1 p.140; sections 9.6 pp.147–148</a:t>
+              <a:t>Textbook sections 9.1 pp.220–221; sections 9.6 pp.228–229</a:t>
             </a:r>
           </a:p>
         </p:txBody>
@@ -41959,7 +41959,7 @@
                 </a:solidFill>
                 <a:latin typeface="Arial"/>
               </a:rPr>
-              <a:t>Textbook p.140 • Example 9.1 — A rectangular guard frame</a:t>
+              <a:t>Textbook p.220 • Example 9.1 — A rectangular guard frame</a:t>
             </a:r>
           </a:p>
         </p:txBody>

--- a/carpentry/intake-142/PowerPoint/Day-17_2026-11-27_Week-5.pptx
+++ b/carpentry/intake-142/PowerPoint/Day-17_2026-11-27_Week-5.pptx
@@ -18515,6 +18515,104 @@
           </a:p>
         </p:txBody>
       </p:sp>
+      <p:sp>
+        <p:nvSpPr>
+          <p:cNvPr id="22" name="Play quiz W05-L06"/>
+          <p:cNvSpPr txBox="1"/>
+          <p:nvPr/>
+        </p:nvSpPr>
+        <p:spPr>
+          <a:xfrm>
+            <a:off x="6355080" y="6606540"/>
+            <a:ext cx="822960" cy="210312"/>
+          </a:xfrm>
+          <a:prstGeom prst="rect">
+            <a:avLst/>
+          </a:prstGeom>
+          <a:noFill/>
+        </p:spPr>
+        <p:txBody>
+          <a:bodyPr wrap="square" lIns="0" rIns="0" tIns="0" bIns="0" anchor="t">
+            <a:normAutofit fontScale="100000" lnSpcReduction="0"/>
+          </a:bodyPr>
+          <a:lstStyle/>
+          <a:p>
+            <a:pPr>
+              <a:spcBef>
+                <a:spcPts val="0"/>
+              </a:spcBef>
+              <a:spcAft>
+                <a:spcPts val="0"/>
+              </a:spcAft>
+              <a:defRPr sz="1000" b="0">
+                <a:solidFill>
+                  <a:srgbClr val="D0002B"/>
+                </a:solidFill>
+                <a:latin typeface="Arial"/>
+              </a:defRPr>
+            </a:pPr>
+            <a:r>
+              <a:rPr sz="1000">
+                <a:solidFill>
+                  <a:srgbClr val="F7F8FC"/>
+                </a:solidFill>
+                <a:latin typeface="Arial"/>
+                <a:hlinkClick r:id="rId8"/>
+              </a:rPr>
+              <a:t>Play quiz</a:t>
+            </a:r>
+          </a:p>
+        </p:txBody>
+      </p:sp>
+      <p:sp>
+        <p:nvSpPr>
+          <p:cNvPr id="23" name="Quiz PDF W05-L06"/>
+          <p:cNvSpPr txBox="1"/>
+          <p:nvPr/>
+        </p:nvSpPr>
+        <p:spPr>
+          <a:xfrm>
+            <a:off x="7296912" y="6606540"/>
+            <a:ext cx="1005840" cy="210312"/>
+          </a:xfrm>
+          <a:prstGeom prst="rect">
+            <a:avLst/>
+          </a:prstGeom>
+          <a:noFill/>
+        </p:spPr>
+        <p:txBody>
+          <a:bodyPr wrap="square" lIns="0" rIns="0" tIns="0" bIns="0" anchor="t">
+            <a:normAutofit fontScale="100000" lnSpcReduction="0"/>
+          </a:bodyPr>
+          <a:lstStyle/>
+          <a:p>
+            <a:pPr>
+              <a:spcBef>
+                <a:spcPts val="0"/>
+              </a:spcBef>
+              <a:spcAft>
+                <a:spcPts val="0"/>
+              </a:spcAft>
+              <a:defRPr sz="1000" b="0">
+                <a:solidFill>
+                  <a:srgbClr val="D0002B"/>
+                </a:solidFill>
+                <a:latin typeface="Arial"/>
+              </a:defRPr>
+            </a:pPr>
+            <a:r>
+              <a:rPr sz="1000">
+                <a:solidFill>
+                  <a:srgbClr val="F7F8FC"/>
+                </a:solidFill>
+                <a:latin typeface="Arial"/>
+                <a:hlinkClick r:id="rId9"/>
+              </a:rPr>
+              <a:t>Quiz PDF</a:t>
+            </a:r>
+          </a:p>
+        </p:txBody>
+      </p:sp>
     </p:spTree>
   </p:cSld>
   <p:clrMapOvr>
@@ -37400,6 +37498,104 @@
                 <a:latin typeface="Arial"/>
               </a:rPr>
               <a:t>Day 17  •  2026-11-27  •  43</a:t>
+            </a:r>
+          </a:p>
+        </p:txBody>
+      </p:sp>
+      <p:sp>
+        <p:nvSpPr>
+          <p:cNvPr id="22" name="Play quiz W05-L07"/>
+          <p:cNvSpPr txBox="1"/>
+          <p:nvPr/>
+        </p:nvSpPr>
+        <p:spPr>
+          <a:xfrm>
+            <a:off x="6355080" y="6606540"/>
+            <a:ext cx="822960" cy="210312"/>
+          </a:xfrm>
+          <a:prstGeom prst="rect">
+            <a:avLst/>
+          </a:prstGeom>
+          <a:noFill/>
+        </p:spPr>
+        <p:txBody>
+          <a:bodyPr wrap="square" lIns="0" rIns="0" tIns="0" bIns="0" anchor="t">
+            <a:normAutofit fontScale="100000" lnSpcReduction="0"/>
+          </a:bodyPr>
+          <a:lstStyle/>
+          <a:p>
+            <a:pPr>
+              <a:spcBef>
+                <a:spcPts val="0"/>
+              </a:spcBef>
+              <a:spcAft>
+                <a:spcPts val="0"/>
+              </a:spcAft>
+              <a:defRPr sz="1000" b="0">
+                <a:solidFill>
+                  <a:srgbClr val="D0002B"/>
+                </a:solidFill>
+                <a:latin typeface="Arial"/>
+              </a:defRPr>
+            </a:pPr>
+            <a:r>
+              <a:rPr sz="1000">
+                <a:solidFill>
+                  <a:srgbClr val="F7F8FC"/>
+                </a:solidFill>
+                <a:latin typeface="Arial"/>
+                <a:hlinkClick r:id="rId8"/>
+              </a:rPr>
+              <a:t>Play quiz</a:t>
+            </a:r>
+          </a:p>
+        </p:txBody>
+      </p:sp>
+      <p:sp>
+        <p:nvSpPr>
+          <p:cNvPr id="23" name="Quiz PDF W05-L07"/>
+          <p:cNvSpPr txBox="1"/>
+          <p:nvPr/>
+        </p:nvSpPr>
+        <p:spPr>
+          <a:xfrm>
+            <a:off x="7296912" y="6606540"/>
+            <a:ext cx="1005840" cy="210312"/>
+          </a:xfrm>
+          <a:prstGeom prst="rect">
+            <a:avLst/>
+          </a:prstGeom>
+          <a:noFill/>
+        </p:spPr>
+        <p:txBody>
+          <a:bodyPr wrap="square" lIns="0" rIns="0" tIns="0" bIns="0" anchor="t">
+            <a:normAutofit fontScale="100000" lnSpcReduction="0"/>
+          </a:bodyPr>
+          <a:lstStyle/>
+          <a:p>
+            <a:pPr>
+              <a:spcBef>
+                <a:spcPts val="0"/>
+              </a:spcBef>
+              <a:spcAft>
+                <a:spcPts val="0"/>
+              </a:spcAft>
+              <a:defRPr sz="1000" b="0">
+                <a:solidFill>
+                  <a:srgbClr val="D0002B"/>
+                </a:solidFill>
+                <a:latin typeface="Arial"/>
+              </a:defRPr>
+            </a:pPr>
+            <a:r>
+              <a:rPr sz="1000">
+                <a:solidFill>
+                  <a:srgbClr val="F7F8FC"/>
+                </a:solidFill>
+                <a:latin typeface="Arial"/>
+                <a:hlinkClick r:id="rId9"/>
+              </a:rPr>
+              <a:t>Quiz PDF</a:t>
             </a:r>
           </a:p>
         </p:txBody>
